--- a/resources/map/_lake_topology.pptx
+++ b/resources/map/_lake_topology.pptx
@@ -3225,7 +3225,7 @@
                 </a:solidFill>
                 <a:latin typeface="Calibri"/>
               </a:rPr>
-              <a:t>黑石碑</a:t>
+              <a:t>石碑林</a:t>
             </a:r>
           </a:p>
           <a:p>
@@ -5289,7 +5289,7 @@
                           </a:solidFill>
                           <a:latin typeface="Calibri"/>
                         </a:rPr>
-                        <a:t>黑石碑</a:t>
+                        <a:t>石碑林</a:t>
                       </a:r>
                     </a:p>
                   </a:txBody>
@@ -5333,7 +5333,7 @@
                           </a:solidFill>
                           <a:latin typeface="Calibri"/>
                         </a:rPr>
-                        <a:t>Lake_Monolith　＋ _glow</a:t>
+                        <a:t>Lake_Grove　＋ _glow</a:t>
                       </a:r>
                     </a:p>
                   </a:txBody>
@@ -5355,7 +5355,7 @@
                           </a:solidFill>
                           <a:latin typeface="Calibri"/>
                         </a:rPr>
-                        <a:t>終點：石堤盡頭的黑色方柱，正面刻滿縱向符文</a:t>
+                        <a:t>終點：石堤盡頭一片十幾座的黑色方柱，高矮不一、有斜有倒，正面都刻滿縱向符文</a:t>
                       </a:r>
                     </a:p>
                   </a:txBody>
